--- a/slides/spark/pyspark/introduction_to_pyspark/2_Introduction_to_Spark.pptx
+++ b/slides/spark/pyspark/introduction_to_pyspark/2_Introduction_to_Spark.pptx
@@ -4542,7 +4542,6 @@
   <p:clrMapOvr>
     <a:masterClrMapping/>
   </p:clrMapOvr>
-  <p:hf sldNum="0" hdr="0" dt="0"/>
 </p:sldLayout>
 </file>
 
@@ -4759,7 +4758,6 @@
   <p:clrMapOvr>
     <a:masterClrMapping/>
   </p:clrMapOvr>
-  <p:hf sldNum="0" hdr="0" dt="0"/>
 </p:sldLayout>
 </file>
 
@@ -5060,7 +5058,6 @@
   <p:clrMapOvr>
     <a:masterClrMapping/>
   </p:clrMapOvr>
-  <p:hf sldNum="0" hdr="0" dt="0"/>
 </p:sldLayout>
 </file>
 
@@ -5244,7 +5241,6 @@
   <p:clrMapOvr>
     <a:masterClrMapping/>
   </p:clrMapOvr>
-  <p:hf sldNum="0" hdr="0" dt="0"/>
 </p:sldLayout>
 </file>
 
@@ -5422,7 +5418,6 @@
   <p:clrMapOvr>
     <a:masterClrMapping/>
   </p:clrMapOvr>
-  <p:hf sldNum="0" hdr="0" dt="0"/>
 </p:sldLayout>
 </file>
 
@@ -5600,7 +5595,6 @@
   <p:clrMapOvr>
     <a:masterClrMapping/>
   </p:clrMapOvr>
-  <p:hf sldNum="0" hdr="0" dt="0"/>
 </p:sldLayout>
 </file>
 
@@ -5905,7 +5899,6 @@
   <p:clrMapOvr>
     <a:masterClrMapping/>
   </p:clrMapOvr>
-  <p:hf sldNum="0" hdr="0" dt="0"/>
 </p:sldLayout>
 </file>
 
@@ -6131,7 +6124,6 @@
   <p:clrMapOvr>
     <a:masterClrMapping/>
   </p:clrMapOvr>
-  <p:hf sldNum="0" hdr="0" dt="0"/>
 </p:sldLayout>
 </file>
 
@@ -6342,7 +6334,6 @@
   <p:clrMapOvr>
     <a:masterClrMapping/>
   </p:clrMapOvr>
-  <p:hf sldNum="0" hdr="0" dt="0"/>
 </p:sldLayout>
 </file>
 
@@ -6553,7 +6544,6 @@
   <p:clrMapOvr>
     <a:masterClrMapping/>
   </p:clrMapOvr>
-  <p:hf sldNum="0" hdr="0" dt="0"/>
 </p:sldLayout>
 </file>
 
@@ -6779,7 +6769,6 @@
   <p:clrMapOvr>
     <a:masterClrMapping/>
   </p:clrMapOvr>
-  <p:hf sldNum="0" hdr="0" dt="0"/>
 </p:sldLayout>
 </file>
 
@@ -7005,7 +6994,6 @@
   <p:clrMapOvr>
     <a:masterClrMapping/>
   </p:clrMapOvr>
-  <p:hf sldNum="0" hdr="0" dt="0"/>
 </p:sldLayout>
 </file>
 
@@ -7279,7 +7267,6 @@
   <p:clrMapOvr>
     <a:masterClrMapping/>
   </p:clrMapOvr>
-  <p:hf sldNum="0" hdr="0" dt="0"/>
 </p:sldLayout>
 </file>
 
@@ -7553,7 +7540,6 @@
   <p:clrMapOvr>
     <a:masterClrMapping/>
   </p:clrMapOvr>
-  <p:hf sldNum="0" hdr="0" dt="0"/>
 </p:sldLayout>
 </file>
 
@@ -8140,7 +8126,6 @@
   <p:clrMapOvr>
     <a:masterClrMapping/>
   </p:clrMapOvr>
-  <p:hf sldNum="0" hdr="0" dt="0"/>
 </p:sldLayout>
 </file>
 
@@ -8691,7 +8676,6 @@
   <p:clrMapOvr>
     <a:masterClrMapping/>
   </p:clrMapOvr>
-  <p:hf sldNum="0" hdr="0" dt="0"/>
 </p:sldLayout>
 </file>
 
@@ -9481,7 +9465,6 @@
   <p:clrMapOvr>
     <a:masterClrMapping/>
   </p:clrMapOvr>
-  <p:hf sldNum="0" hdr="0" dt="0"/>
 </p:sldLayout>
 </file>
 
@@ -9900,7 +9883,6 @@
   <p:clrMapOvr>
     <a:masterClrMapping/>
   </p:clrMapOvr>
-  <p:hf sldNum="0" hdr="0" dt="0"/>
 </p:sldLayout>
 </file>
 
@@ -9964,7 +9946,6 @@
   <p:clrMapOvr>
     <a:masterClrMapping/>
   </p:clrMapOvr>
-  <p:hf sldNum="0" hdr="0" dt="0"/>
 </p:sldLayout>
 </file>
 
@@ -10197,7 +10178,6 @@
   <p:clrMapOvr>
     <a:masterClrMapping/>
   </p:clrMapOvr>
-  <p:hf sldNum="0" hdr="0" dt="0"/>
 </p:sldLayout>
 </file>
 
@@ -10423,7 +10403,6 @@
   <p:clrMapOvr>
     <a:masterClrMapping/>
   </p:clrMapOvr>
-  <p:hf sldNum="0" hdr="0" dt="0"/>
 </p:sldLayout>
 </file>
 
@@ -10657,10 +10636,6 @@
           <a:bodyPr/>
           <a:lstStyle/>
           <a:p>
-            <a:fld id="{5B3DB38B-F70D-144F-89B7-4167F0040C69}" type="datetimeFigureOut">
-              <a:rPr lang="en-US" smtClean="0"/>
-              <a:t>4/19/23</a:t>
-            </a:fld>
             <a:endParaRPr lang="en-US"/>
           </a:p>
         </p:txBody>
@@ -11291,10 +11266,6 @@
           <a:bodyPr/>
           <a:lstStyle/>
           <a:p>
-            <a:fld id="{5B3DB38B-F70D-144F-89B7-4167F0040C69}" type="datetimeFigureOut">
-              <a:rPr lang="en-US" smtClean="0"/>
-              <a:t>4/19/23</a:t>
-            </a:fld>
             <a:endParaRPr lang="en-US"/>
           </a:p>
         </p:txBody>
@@ -11739,10 +11710,6 @@
           <a:bodyPr/>
           <a:lstStyle/>
           <a:p>
-            <a:fld id="{5B3DB38B-F70D-144F-89B7-4167F0040C69}" type="datetimeFigureOut">
-              <a:rPr lang="en-US" smtClean="0"/>
-              <a:t>4/19/23</a:t>
-            </a:fld>
             <a:endParaRPr lang="en-US"/>
           </a:p>
         </p:txBody>
@@ -13115,7 +13082,7 @@
   <p:transition spd="med">
     <p:wipe dir="r"/>
   </p:transition>
-  <p:hf sldNum="0" hdr="0" dt="0"/>
+  <p:hf hdr="0" ftr="0" dt="0"/>
   <p:txStyles>
     <p:titleStyle>
       <a:lvl1pPr algn="l" rtl="0" eaLnBrk="1" fontAlgn="base" hangingPunct="1">
@@ -13917,7 +13884,7 @@
   <p:transition spd="med">
     <p:wipe dir="r"/>
   </p:transition>
-  <p:hf sldNum="0" hdr="0" dt="0"/>
+  <p:hf hdr="0" ftr="0" dt="0"/>
   <p:txStyles>
     <p:titleStyle>
       <a:lvl1pPr algn="l" rtl="0" eaLnBrk="0" fontAlgn="base" hangingPunct="0">
@@ -14499,7 +14466,7 @@
   <p:transition spd="med">
     <p:wipe dir="r"/>
   </p:transition>
-  <p:hf sldNum="0" hdr="0" dt="0"/>
+  <p:hf hdr="0" ftr="0" dt="0"/>
   <p:txStyles>
     <p:titleStyle>
       <a:lvl1pPr algn="l" defTabSz="685800" rtl="0" eaLnBrk="1" latinLnBrk="0" hangingPunct="1">
@@ -17347,6 +17314,35 @@
               </a:rPr>
               <a:t>();</a:t>
             </a:r>
+          </a:p>
+        </p:txBody>
+      </p:sp>
+      <p:sp>
+        <p:nvSpPr>
+          <p:cNvPr id="2" name="Slide Number Placeholder 1">
+            <a:extLst>
+              <a:ext uri="{FF2B5EF4-FFF2-40B4-BE49-F238E27FC236}">
+                <a16:creationId xmlns:a16="http://schemas.microsoft.com/office/drawing/2014/main" id="{C59D3FAB-99AC-A74F-2CAE-1D6349619749}"/>
+              </a:ext>
+            </a:extLst>
+          </p:cNvPr>
+          <p:cNvSpPr>
+            <a:spLocks noGrp="1"/>
+          </p:cNvSpPr>
+          <p:nvPr>
+            <p:ph type="sldNum" sz="quarter" idx="12"/>
+          </p:nvPr>
+        </p:nvSpPr>
+        <p:spPr/>
+        <p:txBody>
+          <a:bodyPr/>
+          <a:lstStyle/>
+          <a:p>
+            <a:fld id="{D105E92A-1E01-7944-A861-7A5F229C68CB}" type="slidenum">
+              <a:rPr lang="en-US" smtClean="0"/>
+              <a:t>14</a:t>
+            </a:fld>
+            <a:endParaRPr lang="en-US"/>
           </a:p>
         </p:txBody>
       </p:sp>
@@ -23581,6 +23577,35 @@
               </a:rPr>
               <a:t>distributed datasets</a:t>
             </a:r>
+          </a:p>
+        </p:txBody>
+      </p:sp>
+      <p:sp>
+        <p:nvSpPr>
+          <p:cNvPr id="2" name="Slide Number Placeholder 1">
+            <a:extLst>
+              <a:ext uri="{FF2B5EF4-FFF2-40B4-BE49-F238E27FC236}">
+                <a16:creationId xmlns:a16="http://schemas.microsoft.com/office/drawing/2014/main" id="{1083249B-E37E-B0C9-2CD8-8B33817152F8}"/>
+              </a:ext>
+            </a:extLst>
+          </p:cNvPr>
+          <p:cNvSpPr>
+            <a:spLocks noGrp="1"/>
+          </p:cNvSpPr>
+          <p:nvPr>
+            <p:ph type="sldNum" sz="quarter" idx="12"/>
+          </p:nvPr>
+        </p:nvSpPr>
+        <p:spPr/>
+        <p:txBody>
+          <a:bodyPr/>
+          <a:lstStyle/>
+          <a:p>
+            <a:fld id="{D105E92A-1E01-7944-A861-7A5F229C68CB}" type="slidenum">
+              <a:rPr lang="en-US" smtClean="0"/>
+              <a:t>28</a:t>
+            </a:fld>
+            <a:endParaRPr lang="en-US"/>
           </a:p>
         </p:txBody>
       </p:sp>
@@ -28958,6 +28983,35 @@
           </a:p>
         </p:txBody>
       </p:sp>
+      <p:sp>
+        <p:nvSpPr>
+          <p:cNvPr id="4" name="Slide Number Placeholder 3">
+            <a:extLst>
+              <a:ext uri="{FF2B5EF4-FFF2-40B4-BE49-F238E27FC236}">
+                <a16:creationId xmlns:a16="http://schemas.microsoft.com/office/drawing/2014/main" id="{36C26888-2EB3-24F5-477B-383C18E81823}"/>
+              </a:ext>
+            </a:extLst>
+          </p:cNvPr>
+          <p:cNvSpPr>
+            <a:spLocks noGrp="1"/>
+          </p:cNvSpPr>
+          <p:nvPr>
+            <p:ph type="sldNum" sz="quarter" idx="12"/>
+          </p:nvPr>
+        </p:nvSpPr>
+        <p:spPr/>
+        <p:txBody>
+          <a:bodyPr/>
+          <a:lstStyle/>
+          <a:p>
+            <a:fld id="{D105E92A-1E01-7944-A861-7A5F229C68CB}" type="slidenum">
+              <a:rPr lang="en-US" smtClean="0"/>
+              <a:t>32</a:t>
+            </a:fld>
+            <a:endParaRPr lang="en-US"/>
+          </a:p>
+        </p:txBody>
+      </p:sp>
     </p:spTree>
     <p:extLst>
       <p:ext uri="{BB962C8B-B14F-4D97-AF65-F5344CB8AC3E}">
@@ -29056,6 +29110,35 @@
           </a:xfrm>
         </p:spPr>
       </p:pic>
+      <p:sp>
+        <p:nvSpPr>
+          <p:cNvPr id="3" name="Slide Number Placeholder 2">
+            <a:extLst>
+              <a:ext uri="{FF2B5EF4-FFF2-40B4-BE49-F238E27FC236}">
+                <a16:creationId xmlns:a16="http://schemas.microsoft.com/office/drawing/2014/main" id="{E8F7EE9C-A32C-CB76-743F-4DEF8EFF3E2B}"/>
+              </a:ext>
+            </a:extLst>
+          </p:cNvPr>
+          <p:cNvSpPr>
+            <a:spLocks noGrp="1"/>
+          </p:cNvSpPr>
+          <p:nvPr>
+            <p:ph type="sldNum" sz="quarter" idx="12"/>
+          </p:nvPr>
+        </p:nvSpPr>
+        <p:spPr/>
+        <p:txBody>
+          <a:bodyPr/>
+          <a:lstStyle/>
+          <a:p>
+            <a:fld id="{D105E92A-1E01-7944-A861-7A5F229C68CB}" type="slidenum">
+              <a:rPr lang="en-US" smtClean="0"/>
+              <a:t>33</a:t>
+            </a:fld>
+            <a:endParaRPr lang="en-US"/>
+          </a:p>
+        </p:txBody>
+      </p:sp>
     </p:spTree>
     <p:extLst>
       <p:ext uri="{BB962C8B-B14F-4D97-AF65-F5344CB8AC3E}">
